--- a/BACKUP&RECOVERY/02장/02장_복구_가능성_구성.pptx
+++ b/BACKUP&RECOVERY/02장/02장_복구_가능성_구성.pptx
@@ -11353,7 +11353,7 @@
                 <a:latin typeface="Consolas"/>
                 <a:ea typeface="Consolas"/>
               </a:rPr>
-              <a:t>  2    '/u01/app/oracle/oradata/ORCL/control01.ctl',</a:t>
+              <a:t>  2    '/u01/app/oracle/oradata/orcl/control01.ctl',</a:t>
             </a:r>
           </a:p>
           <a:p>
@@ -11370,7 +11370,7 @@
                 <a:latin typeface="Consolas"/>
                 <a:ea typeface="Consolas"/>
               </a:rPr>
-              <a:t>  3    '/u01/app/oracle/oradata/ORCL/control02.ctl',</a:t>
+              <a:t>  3    '/u01/app/oracle/oradata/orcl/control02.ctl',</a:t>
             </a:r>
           </a:p>
           <a:p>
@@ -11387,7 +11387,7 @@
                 <a:latin typeface="Consolas"/>
                 <a:ea typeface="Consolas"/>
               </a:rPr>
-              <a:t>  4    '/u02/oradata/ORCL/control03.ctl' SCOPE=spfile;</a:t>
+              <a:t>  4    '/u02/oradata/orcl/control03.ctl' SCOPE=spfile;</a:t>
             </a:r>
           </a:p>
           <a:p>
@@ -11489,7 +11489,7 @@
                 <a:latin typeface="Consolas"/>
                 <a:ea typeface="Consolas"/>
               </a:rPr>
-              <a:t>SYS@orcl&gt; !mkdir -p /u02/oradata/ORCL</a:t>
+              <a:t>SYS@orcl&gt; !mkdir -p /u02/oradata/orcl</a:t>
             </a:r>
           </a:p>
           <a:p>
@@ -11506,7 +11506,7 @@
                 <a:latin typeface="Consolas"/>
                 <a:ea typeface="Consolas"/>
               </a:rPr>
-              <a:t>SYS@orcl&gt; !cp -v /u01/app/oracle/oradata/ORCL/control01.ctl /u02/oradata/ORCL/control03.ctl</a:t>
+              <a:t>SYS@orcl&gt; !cp -v /u01/app/oracle/oradata/orcl/control01.ctl /u02/oradata/orcl/control03.ctl</a:t>
             </a:r>
           </a:p>
           <a:p>
@@ -11625,7 +11625,7 @@
                 <a:latin typeface="Consolas"/>
                 <a:ea typeface="Consolas"/>
               </a:rPr>
-              <a:t>SYS@orcl&gt; !ls -l --time-style=+%H:%M:%S /u01/.../control0*.ctl /u02/oradata/ORCL/control03.ctl</a:t>
+              <a:t>SYS@orcl&gt; !ls -l --time-style=+%H:%M:%S /u01/.../control0*.ctl /u02/oradata/orcl/control03.ctl</a:t>
             </a:r>
           </a:p>
           <a:p>
@@ -11642,7 +11642,7 @@
                 <a:latin typeface="Consolas"/>
                 <a:ea typeface="Consolas"/>
               </a:rPr>
-              <a:t>-rw-r-----. 1 oracle oinstall 10600448 15:41:22 .../control01.ctl</a:t>
+              <a:t>-rw-r-----. 1 oracle dba 10600448 15:41:22 .../control01.ctl</a:t>
             </a:r>
           </a:p>
           <a:p>
@@ -11659,7 +11659,7 @@
                 <a:latin typeface="Consolas"/>
                 <a:ea typeface="Consolas"/>
               </a:rPr>
-              <a:t>-rw-r-----. 1 oracle oinstall 10600448 15:41:22 .../control02.ctl</a:t>
+              <a:t>-rw-r-----. 1 oracle dba 10600448 15:41:22 .../control02.ctl</a:t>
             </a:r>
           </a:p>
           <a:p>
@@ -11676,7 +11676,7 @@
                 <a:latin typeface="Consolas"/>
                 <a:ea typeface="Consolas"/>
               </a:rPr>
-              <a:t>-rw-r-----. 1 oracle oinstall 10600448 15:41:22 /u02/oradata/ORCL/control03.ctl</a:t>
+              <a:t>-rw-r-----. 1 oracle dba 10600448 15:41:22 /u02/oradata/orcl/control03.ctl</a:t>
             </a:r>
           </a:p>
         </p:txBody>
@@ -12151,7 +12151,7 @@
                 <a:latin typeface="Consolas"/>
                 <a:ea typeface="Consolas"/>
               </a:rPr>
-              <a:t>  2    '/u02/oradata/ORCL/redo01b.log' TO GROUP 1;</a:t>
+              <a:t>  2    '/u02/oradata/orcl/redo01b.log' TO GROUP 1;</a:t>
             </a:r>
           </a:p>
           <a:p>
@@ -12287,7 +12287,7 @@
                 <a:latin typeface="Consolas"/>
                 <a:ea typeface="Consolas"/>
               </a:rPr>
-              <a:t>         1 /u01/app/oracle/oradata/ORCL/redo01.log</a:t>
+              <a:t>         1 /u01/app/oracle/oradata/orcl/redo01.log</a:t>
             </a:r>
           </a:p>
           <a:p>
@@ -12304,7 +12304,7 @@
                 <a:latin typeface="Consolas"/>
                 <a:ea typeface="Consolas"/>
               </a:rPr>
-              <a:t>         1 /u02/oradata/ORCL/redo01b.log                 INVALID</a:t>
+              <a:t>         1 /u02/oradata/orcl/redo01b.log                 INVALID</a:t>
             </a:r>
           </a:p>
           <a:p>
@@ -12321,7 +12321,7 @@
                 <a:latin typeface="Consolas"/>
                 <a:ea typeface="Consolas"/>
               </a:rPr>
-              <a:t>         2 /u01/app/oracle/oradata/ORCL/redo02.log</a:t>
+              <a:t>         2 /u01/app/oracle/oradata/orcl/redo02.log</a:t>
             </a:r>
           </a:p>
           <a:p>
@@ -12338,7 +12338,7 @@
                 <a:latin typeface="Consolas"/>
                 <a:ea typeface="Consolas"/>
               </a:rPr>
-              <a:t>         2 /u02/oradata/ORCL/redo02b.log                 INVALID</a:t>
+              <a:t>         2 /u02/oradata/orcl/redo02b.log                 INVALID</a:t>
             </a:r>
           </a:p>
           <a:p>
@@ -12508,7 +12508,7 @@
                 <a:latin typeface="Consolas"/>
                 <a:ea typeface="Consolas"/>
               </a:rPr>
-              <a:t>         1 /u01/app/oracle/oradata/ORCL/redo01.log</a:t>
+              <a:t>         1 /u01/app/oracle/oradata/orcl/redo01.log</a:t>
             </a:r>
           </a:p>
           <a:p>
@@ -12525,7 +12525,7 @@
                 <a:latin typeface="Consolas"/>
                 <a:ea typeface="Consolas"/>
               </a:rPr>
-              <a:t>         1 /u02/oradata/ORCL/redo01b.log</a:t>
+              <a:t>         1 /u02/oradata/orcl/redo01b.log</a:t>
             </a:r>
           </a:p>
         </p:txBody>
@@ -12776,7 +12776,7 @@
                 <a:latin typeface="Consolas"/>
                 <a:ea typeface="Consolas"/>
               </a:rPr>
-              <a:t>  2    ('/u01/app/oracle/oradata/ORCL/redo04.log',</a:t>
+              <a:t>  2    ('/u01/app/oracle/oradata/orcl/redo04.log',</a:t>
             </a:r>
           </a:p>
           <a:p>
@@ -12793,7 +12793,7 @@
                 <a:latin typeface="Consolas"/>
                 <a:ea typeface="Consolas"/>
               </a:rPr>
-              <a:t>  3     '/u02/oradata/ORCL/redo04b.log') SIZE 50M;</a:t>
+              <a:t>  3     '/u02/oradata/orcl/redo04b.log') SIZE 50M;</a:t>
             </a:r>
           </a:p>
           <a:p>
@@ -12946,7 +12946,7 @@
                 <a:latin typeface="Consolas"/>
                 <a:ea typeface="Consolas"/>
               </a:rPr>
-              <a:t>ORA-00312: online log 2 thread 1: '/u01/app/oracle/oradata/ORCL/redo02.log'</a:t>
+              <a:t>ORA-00312: online log 2 thread 1: '/u01/app/oracle/oradata/orcl/redo02.log'</a:t>
             </a:r>
           </a:p>
           <a:p>
@@ -13184,7 +13184,7 @@
                 <a:latin typeface="Consolas"/>
                 <a:ea typeface="Consolas"/>
               </a:rPr>
-              <a:t>SYS@orcl&gt; !rm -f /u01/app/oracle/oradata/ORCL/redo02.log /u02/oradata/ORCL/redo02b.log</a:t>
+              <a:t>SYS@orcl&gt; !rm -f /u01/app/oracle/oradata/orcl/redo02.log /u02/oradata/orcl/redo02b.log</a:t>
             </a:r>
           </a:p>
         </p:txBody>
